--- a/改變我改變世界(崇拜版).pptx
+++ b/改變我改變世界(崇拜版).pptx
@@ -157,7 +157,7 @@
           <a:lstStyle/>
           <a:p>
             <a:r>
-              <a:rPr lang="en-US" altLang="zh-TW" smtClean="0"/>
+              <a:rPr lang="en-US" altLang="zh-TW"/>
               <a:t>Click to edit Master title style</a:t>
             </a:r>
             <a:endParaRPr lang="zh-TW" altLang="en-US"/>
@@ -276,7 +276,7 @@
           </a:lstStyle>
           <a:p>
             <a:r>
-              <a:rPr lang="en-US" altLang="zh-TW" smtClean="0"/>
+              <a:rPr lang="en-US" altLang="zh-TW"/>
               <a:t>Click to edit Master subtitle style</a:t>
             </a:r>
             <a:endParaRPr lang="zh-TW" altLang="en-US"/>
@@ -300,7 +300,7 @@
           <a:p>
             <a:fld id="{29BA8E5B-A195-448A-8666-69CCADE813AC}" type="datetimeFigureOut">
               <a:rPr lang="vi-VN" smtClean="0"/>
-              <a:t>19/03/2022</a:t>
+              <a:t>16/01/2026</a:t>
             </a:fld>
             <a:endParaRPr lang="vi-VN"/>
           </a:p>
@@ -394,7 +394,7 @@
           <a:lstStyle/>
           <a:p>
             <a:r>
-              <a:rPr lang="en-US" altLang="zh-TW" smtClean="0"/>
+              <a:rPr lang="en-US" altLang="zh-TW"/>
               <a:t>Click to edit Master title style</a:t>
             </a:r>
             <a:endParaRPr lang="zh-TW" altLang="en-US"/>
@@ -418,35 +418,35 @@
           <a:p>
             <a:pPr lvl="0"/>
             <a:r>
-              <a:rPr lang="en-US" altLang="zh-TW" smtClean="0"/>
+              <a:rPr lang="en-US" altLang="zh-TW"/>
               <a:t>Edit Master text styles</a:t>
             </a:r>
           </a:p>
           <a:p>
             <a:pPr lvl="1"/>
             <a:r>
-              <a:rPr lang="en-US" altLang="zh-TW" smtClean="0"/>
+              <a:rPr lang="en-US" altLang="zh-TW"/>
               <a:t>Second level</a:t>
             </a:r>
           </a:p>
           <a:p>
             <a:pPr lvl="2"/>
             <a:r>
-              <a:rPr lang="en-US" altLang="zh-TW" smtClean="0"/>
+              <a:rPr lang="en-US" altLang="zh-TW"/>
               <a:t>Third level</a:t>
             </a:r>
           </a:p>
           <a:p>
             <a:pPr lvl="3"/>
             <a:r>
-              <a:rPr lang="en-US" altLang="zh-TW" smtClean="0"/>
+              <a:rPr lang="en-US" altLang="zh-TW"/>
               <a:t>Fourth level</a:t>
             </a:r>
           </a:p>
           <a:p>
             <a:pPr lvl="4"/>
             <a:r>
-              <a:rPr lang="en-US" altLang="zh-TW" smtClean="0"/>
+              <a:rPr lang="en-US" altLang="zh-TW"/>
               <a:t>Fifth level</a:t>
             </a:r>
             <a:endParaRPr lang="zh-TW" altLang="en-US"/>
@@ -470,7 +470,7 @@
           <a:p>
             <a:fld id="{29BA8E5B-A195-448A-8666-69CCADE813AC}" type="datetimeFigureOut">
               <a:rPr lang="vi-VN" smtClean="0"/>
-              <a:t>19/03/2022</a:t>
+              <a:t>16/01/2026</a:t>
             </a:fld>
             <a:endParaRPr lang="vi-VN"/>
           </a:p>
@@ -569,7 +569,7 @@
           <a:lstStyle/>
           <a:p>
             <a:r>
-              <a:rPr lang="en-US" altLang="zh-TW" smtClean="0"/>
+              <a:rPr lang="en-US" altLang="zh-TW"/>
               <a:t>Click to edit Master title style</a:t>
             </a:r>
             <a:endParaRPr lang="zh-TW" altLang="en-US"/>
@@ -598,35 +598,35 @@
           <a:p>
             <a:pPr lvl="0"/>
             <a:r>
-              <a:rPr lang="en-US" altLang="zh-TW" smtClean="0"/>
+              <a:rPr lang="en-US" altLang="zh-TW"/>
               <a:t>Edit Master text styles</a:t>
             </a:r>
           </a:p>
           <a:p>
             <a:pPr lvl="1"/>
             <a:r>
-              <a:rPr lang="en-US" altLang="zh-TW" smtClean="0"/>
+              <a:rPr lang="en-US" altLang="zh-TW"/>
               <a:t>Second level</a:t>
             </a:r>
           </a:p>
           <a:p>
             <a:pPr lvl="2"/>
             <a:r>
-              <a:rPr lang="en-US" altLang="zh-TW" smtClean="0"/>
+              <a:rPr lang="en-US" altLang="zh-TW"/>
               <a:t>Third level</a:t>
             </a:r>
           </a:p>
           <a:p>
             <a:pPr lvl="3"/>
             <a:r>
-              <a:rPr lang="en-US" altLang="zh-TW" smtClean="0"/>
+              <a:rPr lang="en-US" altLang="zh-TW"/>
               <a:t>Fourth level</a:t>
             </a:r>
           </a:p>
           <a:p>
             <a:pPr lvl="4"/>
             <a:r>
-              <a:rPr lang="en-US" altLang="zh-TW" smtClean="0"/>
+              <a:rPr lang="en-US" altLang="zh-TW"/>
               <a:t>Fifth level</a:t>
             </a:r>
             <a:endParaRPr lang="zh-TW" altLang="en-US"/>
@@ -650,7 +650,7 @@
           <a:p>
             <a:fld id="{29BA8E5B-A195-448A-8666-69CCADE813AC}" type="datetimeFigureOut">
               <a:rPr lang="vi-VN" smtClean="0"/>
-              <a:t>19/03/2022</a:t>
+              <a:t>16/01/2026</a:t>
             </a:fld>
             <a:endParaRPr lang="vi-VN"/>
           </a:p>
@@ -744,7 +744,7 @@
           <a:lstStyle/>
           <a:p>
             <a:r>
-              <a:rPr lang="en-US" altLang="zh-TW" smtClean="0"/>
+              <a:rPr lang="en-US" altLang="zh-TW"/>
               <a:t>Click to edit Master title style</a:t>
             </a:r>
             <a:endParaRPr lang="zh-TW" altLang="en-US"/>
@@ -768,35 +768,35 @@
           <a:p>
             <a:pPr lvl="0"/>
             <a:r>
-              <a:rPr lang="en-US" altLang="zh-TW" smtClean="0"/>
+              <a:rPr lang="en-US" altLang="zh-TW"/>
               <a:t>Edit Master text styles</a:t>
             </a:r>
           </a:p>
           <a:p>
             <a:pPr lvl="1"/>
             <a:r>
-              <a:rPr lang="en-US" altLang="zh-TW" smtClean="0"/>
+              <a:rPr lang="en-US" altLang="zh-TW"/>
               <a:t>Second level</a:t>
             </a:r>
           </a:p>
           <a:p>
             <a:pPr lvl="2"/>
             <a:r>
-              <a:rPr lang="en-US" altLang="zh-TW" smtClean="0"/>
+              <a:rPr lang="en-US" altLang="zh-TW"/>
               <a:t>Third level</a:t>
             </a:r>
           </a:p>
           <a:p>
             <a:pPr lvl="3"/>
             <a:r>
-              <a:rPr lang="en-US" altLang="zh-TW" smtClean="0"/>
+              <a:rPr lang="en-US" altLang="zh-TW"/>
               <a:t>Fourth level</a:t>
             </a:r>
           </a:p>
           <a:p>
             <a:pPr lvl="4"/>
             <a:r>
-              <a:rPr lang="en-US" altLang="zh-TW" smtClean="0"/>
+              <a:rPr lang="en-US" altLang="zh-TW"/>
               <a:t>Fifth level</a:t>
             </a:r>
             <a:endParaRPr lang="zh-TW" altLang="en-US"/>
@@ -820,7 +820,7 @@
           <a:p>
             <a:fld id="{29BA8E5B-A195-448A-8666-69CCADE813AC}" type="datetimeFigureOut">
               <a:rPr lang="vi-VN" smtClean="0"/>
-              <a:t>19/03/2022</a:t>
+              <a:t>16/01/2026</a:t>
             </a:fld>
             <a:endParaRPr lang="vi-VN"/>
           </a:p>
@@ -923,7 +923,7 @@
           </a:lstStyle>
           <a:p>
             <a:r>
-              <a:rPr lang="en-US" altLang="zh-TW" smtClean="0"/>
+              <a:rPr lang="en-US" altLang="zh-TW"/>
               <a:t>Click to edit Master title style</a:t>
             </a:r>
             <a:endParaRPr lang="zh-TW" altLang="en-US"/>
@@ -1043,7 +1043,7 @@
           <a:p>
             <a:pPr lvl="0"/>
             <a:r>
-              <a:rPr lang="en-US" altLang="zh-TW" smtClean="0"/>
+              <a:rPr lang="en-US" altLang="zh-TW"/>
               <a:t>Edit Master text styles</a:t>
             </a:r>
           </a:p>
@@ -1066,7 +1066,7 @@
           <a:p>
             <a:fld id="{29BA8E5B-A195-448A-8666-69CCADE813AC}" type="datetimeFigureOut">
               <a:rPr lang="vi-VN" smtClean="0"/>
-              <a:t>19/03/2022</a:t>
+              <a:t>16/01/2026</a:t>
             </a:fld>
             <a:endParaRPr lang="vi-VN"/>
           </a:p>
@@ -1160,7 +1160,7 @@
           <a:lstStyle/>
           <a:p>
             <a:r>
-              <a:rPr lang="en-US" altLang="zh-TW" smtClean="0"/>
+              <a:rPr lang="en-US" altLang="zh-TW"/>
               <a:t>Click to edit Master title style</a:t>
             </a:r>
             <a:endParaRPr lang="zh-TW" altLang="en-US"/>
@@ -1217,35 +1217,35 @@
           <a:p>
             <a:pPr lvl="0"/>
             <a:r>
-              <a:rPr lang="en-US" altLang="zh-TW" smtClean="0"/>
+              <a:rPr lang="en-US" altLang="zh-TW"/>
               <a:t>Edit Master text styles</a:t>
             </a:r>
           </a:p>
           <a:p>
             <a:pPr lvl="1"/>
             <a:r>
-              <a:rPr lang="en-US" altLang="zh-TW" smtClean="0"/>
+              <a:rPr lang="en-US" altLang="zh-TW"/>
               <a:t>Second level</a:t>
             </a:r>
           </a:p>
           <a:p>
             <a:pPr lvl="2"/>
             <a:r>
-              <a:rPr lang="en-US" altLang="zh-TW" smtClean="0"/>
+              <a:rPr lang="en-US" altLang="zh-TW"/>
               <a:t>Third level</a:t>
             </a:r>
           </a:p>
           <a:p>
             <a:pPr lvl="3"/>
             <a:r>
-              <a:rPr lang="en-US" altLang="zh-TW" smtClean="0"/>
+              <a:rPr lang="en-US" altLang="zh-TW"/>
               <a:t>Fourth level</a:t>
             </a:r>
           </a:p>
           <a:p>
             <a:pPr lvl="4"/>
             <a:r>
-              <a:rPr lang="en-US" altLang="zh-TW" smtClean="0"/>
+              <a:rPr lang="en-US" altLang="zh-TW"/>
               <a:t>Fifth level</a:t>
             </a:r>
             <a:endParaRPr lang="zh-TW" altLang="en-US"/>
@@ -1302,35 +1302,35 @@
           <a:p>
             <a:pPr lvl="0"/>
             <a:r>
-              <a:rPr lang="en-US" altLang="zh-TW" smtClean="0"/>
+              <a:rPr lang="en-US" altLang="zh-TW"/>
               <a:t>Edit Master text styles</a:t>
             </a:r>
           </a:p>
           <a:p>
             <a:pPr lvl="1"/>
             <a:r>
-              <a:rPr lang="en-US" altLang="zh-TW" smtClean="0"/>
+              <a:rPr lang="en-US" altLang="zh-TW"/>
               <a:t>Second level</a:t>
             </a:r>
           </a:p>
           <a:p>
             <a:pPr lvl="2"/>
             <a:r>
-              <a:rPr lang="en-US" altLang="zh-TW" smtClean="0"/>
+              <a:rPr lang="en-US" altLang="zh-TW"/>
               <a:t>Third level</a:t>
             </a:r>
           </a:p>
           <a:p>
             <a:pPr lvl="3"/>
             <a:r>
-              <a:rPr lang="en-US" altLang="zh-TW" smtClean="0"/>
+              <a:rPr lang="en-US" altLang="zh-TW"/>
               <a:t>Fourth level</a:t>
             </a:r>
           </a:p>
           <a:p>
             <a:pPr lvl="4"/>
             <a:r>
-              <a:rPr lang="en-US" altLang="zh-TW" smtClean="0"/>
+              <a:rPr lang="en-US" altLang="zh-TW"/>
               <a:t>Fifth level</a:t>
             </a:r>
             <a:endParaRPr lang="zh-TW" altLang="en-US"/>
@@ -1354,7 +1354,7 @@
           <a:p>
             <a:fld id="{29BA8E5B-A195-448A-8666-69CCADE813AC}" type="datetimeFigureOut">
               <a:rPr lang="vi-VN" smtClean="0"/>
-              <a:t>19/03/2022</a:t>
+              <a:t>16/01/2026</a:t>
             </a:fld>
             <a:endParaRPr lang="vi-VN"/>
           </a:p>
@@ -1452,7 +1452,7 @@
           </a:lstStyle>
           <a:p>
             <a:r>
-              <a:rPr lang="en-US" altLang="zh-TW" smtClean="0"/>
+              <a:rPr lang="en-US" altLang="zh-TW"/>
               <a:t>Click to edit Master title style</a:t>
             </a:r>
             <a:endParaRPr lang="zh-TW" altLang="en-US"/>
@@ -1518,7 +1518,7 @@
           <a:p>
             <a:pPr lvl="0"/>
             <a:r>
-              <a:rPr lang="en-US" altLang="zh-TW" smtClean="0"/>
+              <a:rPr lang="en-US" altLang="zh-TW"/>
               <a:t>Edit Master text styles</a:t>
             </a:r>
           </a:p>
@@ -1574,35 +1574,35 @@
           <a:p>
             <a:pPr lvl="0"/>
             <a:r>
-              <a:rPr lang="en-US" altLang="zh-TW" smtClean="0"/>
+              <a:rPr lang="en-US" altLang="zh-TW"/>
               <a:t>Edit Master text styles</a:t>
             </a:r>
           </a:p>
           <a:p>
             <a:pPr lvl="1"/>
             <a:r>
-              <a:rPr lang="en-US" altLang="zh-TW" smtClean="0"/>
+              <a:rPr lang="en-US" altLang="zh-TW"/>
               <a:t>Second level</a:t>
             </a:r>
           </a:p>
           <a:p>
             <a:pPr lvl="2"/>
             <a:r>
-              <a:rPr lang="en-US" altLang="zh-TW" smtClean="0"/>
+              <a:rPr lang="en-US" altLang="zh-TW"/>
               <a:t>Third level</a:t>
             </a:r>
           </a:p>
           <a:p>
             <a:pPr lvl="3"/>
             <a:r>
-              <a:rPr lang="en-US" altLang="zh-TW" smtClean="0"/>
+              <a:rPr lang="en-US" altLang="zh-TW"/>
               <a:t>Fourth level</a:t>
             </a:r>
           </a:p>
           <a:p>
             <a:pPr lvl="4"/>
             <a:r>
-              <a:rPr lang="en-US" altLang="zh-TW" smtClean="0"/>
+              <a:rPr lang="en-US" altLang="zh-TW"/>
               <a:t>Fifth level</a:t>
             </a:r>
             <a:endParaRPr lang="zh-TW" altLang="en-US"/>
@@ -1668,7 +1668,7 @@
           <a:p>
             <a:pPr lvl="0"/>
             <a:r>
-              <a:rPr lang="en-US" altLang="zh-TW" smtClean="0"/>
+              <a:rPr lang="en-US" altLang="zh-TW"/>
               <a:t>Edit Master text styles</a:t>
             </a:r>
           </a:p>
@@ -1724,35 +1724,35 @@
           <a:p>
             <a:pPr lvl="0"/>
             <a:r>
-              <a:rPr lang="en-US" altLang="zh-TW" smtClean="0"/>
+              <a:rPr lang="en-US" altLang="zh-TW"/>
               <a:t>Edit Master text styles</a:t>
             </a:r>
           </a:p>
           <a:p>
             <a:pPr lvl="1"/>
             <a:r>
-              <a:rPr lang="en-US" altLang="zh-TW" smtClean="0"/>
+              <a:rPr lang="en-US" altLang="zh-TW"/>
               <a:t>Second level</a:t>
             </a:r>
           </a:p>
           <a:p>
             <a:pPr lvl="2"/>
             <a:r>
-              <a:rPr lang="en-US" altLang="zh-TW" smtClean="0"/>
+              <a:rPr lang="en-US" altLang="zh-TW"/>
               <a:t>Third level</a:t>
             </a:r>
           </a:p>
           <a:p>
             <a:pPr lvl="3"/>
             <a:r>
-              <a:rPr lang="en-US" altLang="zh-TW" smtClean="0"/>
+              <a:rPr lang="en-US" altLang="zh-TW"/>
               <a:t>Fourth level</a:t>
             </a:r>
           </a:p>
           <a:p>
             <a:pPr lvl="4"/>
             <a:r>
-              <a:rPr lang="en-US" altLang="zh-TW" smtClean="0"/>
+              <a:rPr lang="en-US" altLang="zh-TW"/>
               <a:t>Fifth level</a:t>
             </a:r>
             <a:endParaRPr lang="zh-TW" altLang="en-US"/>
@@ -1776,7 +1776,7 @@
           <a:p>
             <a:fld id="{29BA8E5B-A195-448A-8666-69CCADE813AC}" type="datetimeFigureOut">
               <a:rPr lang="vi-VN" smtClean="0"/>
-              <a:t>19/03/2022</a:t>
+              <a:t>16/01/2026</a:t>
             </a:fld>
             <a:endParaRPr lang="vi-VN"/>
           </a:p>
@@ -1870,7 +1870,7 @@
           <a:lstStyle/>
           <a:p>
             <a:r>
-              <a:rPr lang="en-US" altLang="zh-TW" smtClean="0"/>
+              <a:rPr lang="en-US" altLang="zh-TW"/>
               <a:t>Click to edit Master title style</a:t>
             </a:r>
             <a:endParaRPr lang="zh-TW" altLang="en-US"/>
@@ -1894,7 +1894,7 @@
           <a:p>
             <a:fld id="{29BA8E5B-A195-448A-8666-69CCADE813AC}" type="datetimeFigureOut">
               <a:rPr lang="vi-VN" smtClean="0"/>
-              <a:t>19/03/2022</a:t>
+              <a:t>16/01/2026</a:t>
             </a:fld>
             <a:endParaRPr lang="vi-VN"/>
           </a:p>
@@ -1989,7 +1989,7 @@
           <a:p>
             <a:fld id="{29BA8E5B-A195-448A-8666-69CCADE813AC}" type="datetimeFigureOut">
               <a:rPr lang="vi-VN" smtClean="0"/>
-              <a:t>19/03/2022</a:t>
+              <a:t>16/01/2026</a:t>
             </a:fld>
             <a:endParaRPr lang="vi-VN"/>
           </a:p>
@@ -2092,7 +2092,7 @@
           </a:lstStyle>
           <a:p>
             <a:r>
-              <a:rPr lang="en-US" altLang="zh-TW" smtClean="0"/>
+              <a:rPr lang="en-US" altLang="zh-TW"/>
               <a:t>Click to edit Master title style</a:t>
             </a:r>
             <a:endParaRPr lang="zh-TW" altLang="en-US"/>
@@ -2149,35 +2149,35 @@
           <a:p>
             <a:pPr lvl="0"/>
             <a:r>
-              <a:rPr lang="en-US" altLang="zh-TW" smtClean="0"/>
+              <a:rPr lang="en-US" altLang="zh-TW"/>
               <a:t>Edit Master text styles</a:t>
             </a:r>
           </a:p>
           <a:p>
             <a:pPr lvl="1"/>
             <a:r>
-              <a:rPr lang="en-US" altLang="zh-TW" smtClean="0"/>
+              <a:rPr lang="en-US" altLang="zh-TW"/>
               <a:t>Second level</a:t>
             </a:r>
           </a:p>
           <a:p>
             <a:pPr lvl="2"/>
             <a:r>
-              <a:rPr lang="en-US" altLang="zh-TW" smtClean="0"/>
+              <a:rPr lang="en-US" altLang="zh-TW"/>
               <a:t>Third level</a:t>
             </a:r>
           </a:p>
           <a:p>
             <a:pPr lvl="3"/>
             <a:r>
-              <a:rPr lang="en-US" altLang="zh-TW" smtClean="0"/>
+              <a:rPr lang="en-US" altLang="zh-TW"/>
               <a:t>Fourth level</a:t>
             </a:r>
           </a:p>
           <a:p>
             <a:pPr lvl="4"/>
             <a:r>
-              <a:rPr lang="en-US" altLang="zh-TW" smtClean="0"/>
+              <a:rPr lang="en-US" altLang="zh-TW"/>
               <a:t>Fifth level</a:t>
             </a:r>
             <a:endParaRPr lang="zh-TW" altLang="en-US"/>
@@ -2243,7 +2243,7 @@
           <a:p>
             <a:pPr lvl="0"/>
             <a:r>
-              <a:rPr lang="en-US" altLang="zh-TW" smtClean="0"/>
+              <a:rPr lang="en-US" altLang="zh-TW"/>
               <a:t>Edit Master text styles</a:t>
             </a:r>
           </a:p>
@@ -2266,7 +2266,7 @@
           <a:p>
             <a:fld id="{29BA8E5B-A195-448A-8666-69CCADE813AC}" type="datetimeFigureOut">
               <a:rPr lang="vi-VN" smtClean="0"/>
-              <a:t>19/03/2022</a:t>
+              <a:t>16/01/2026</a:t>
             </a:fld>
             <a:endParaRPr lang="vi-VN"/>
           </a:p>
@@ -2369,7 +2369,7 @@
           </a:lstStyle>
           <a:p>
             <a:r>
-              <a:rPr lang="en-US" altLang="zh-TW" smtClean="0"/>
+              <a:rPr lang="en-US" altLang="zh-TW"/>
               <a:t>Click to edit Master title style</a:t>
             </a:r>
             <a:endParaRPr lang="zh-TW" altLang="en-US"/>
@@ -2434,7 +2434,7 @@
           </a:lstStyle>
           <a:p>
             <a:r>
-              <a:rPr lang="en-US" altLang="zh-TW" smtClean="0"/>
+              <a:rPr lang="en-US" altLang="zh-TW"/>
               <a:t>Click icon to add picture</a:t>
             </a:r>
             <a:endParaRPr lang="zh-TW" altLang="en-US"/>
@@ -2500,7 +2500,7 @@
           <a:p>
             <a:pPr lvl="0"/>
             <a:r>
-              <a:rPr lang="en-US" altLang="zh-TW" smtClean="0"/>
+              <a:rPr lang="en-US" altLang="zh-TW"/>
               <a:t>Edit Master text styles</a:t>
             </a:r>
           </a:p>
@@ -2523,7 +2523,7 @@
           <a:p>
             <a:fld id="{29BA8E5B-A195-448A-8666-69CCADE813AC}" type="datetimeFigureOut">
               <a:rPr lang="vi-VN" smtClean="0"/>
-              <a:t>19/03/2022</a:t>
+              <a:t>16/01/2026</a:t>
             </a:fld>
             <a:endParaRPr lang="vi-VN"/>
           </a:p>
@@ -2637,10 +2637,9 @@
           <a:lstStyle/>
           <a:p>
             <a:r>
-              <a:rPr lang="zh-TW" altLang="en-US" smtClean="0"/>
+              <a:rPr lang="zh-TW" altLang="en-US"/>
               <a:t>按一下以編輯母片標題樣式</a:t>
             </a:r>
-            <a:endParaRPr lang="zh-TW" altLang="en-US"/>
           </a:p>
         </p:txBody>
       </p:sp>
@@ -2671,38 +2670,37 @@
           <a:p>
             <a:pPr lvl="0"/>
             <a:r>
-              <a:rPr lang="zh-TW" altLang="en-US" smtClean="0"/>
+              <a:rPr lang="zh-TW" altLang="en-US"/>
               <a:t>按一下以編輯母片文字樣式</a:t>
             </a:r>
           </a:p>
           <a:p>
             <a:pPr lvl="1"/>
             <a:r>
-              <a:rPr lang="zh-TW" altLang="en-US" smtClean="0"/>
+              <a:rPr lang="zh-TW" altLang="en-US"/>
               <a:t>第二層</a:t>
             </a:r>
           </a:p>
           <a:p>
             <a:pPr lvl="2"/>
             <a:r>
-              <a:rPr lang="zh-TW" altLang="en-US" smtClean="0"/>
+              <a:rPr lang="zh-TW" altLang="en-US"/>
               <a:t>第三層</a:t>
             </a:r>
           </a:p>
           <a:p>
             <a:pPr lvl="3"/>
             <a:r>
-              <a:rPr lang="zh-TW" altLang="en-US" smtClean="0"/>
+              <a:rPr lang="zh-TW" altLang="en-US"/>
               <a:t>第四層</a:t>
             </a:r>
           </a:p>
           <a:p>
             <a:pPr lvl="4"/>
             <a:r>
-              <a:rPr lang="zh-TW" altLang="en-US" smtClean="0"/>
+              <a:rPr lang="zh-TW" altLang="en-US"/>
               <a:t>第五層</a:t>
             </a:r>
-            <a:endParaRPr lang="zh-TW" altLang="en-US"/>
           </a:p>
         </p:txBody>
       </p:sp>
@@ -2741,7 +2739,7 @@
           <a:p>
             <a:fld id="{29BA8E5B-A195-448A-8666-69CCADE813AC}" type="datetimeFigureOut">
               <a:rPr lang="vi-VN" smtClean="0"/>
-              <a:t>19/03/2022</a:t>
+              <a:t>16/01/2026</a:t>
             </a:fld>
             <a:endParaRPr lang="vi-VN"/>
           </a:p>
@@ -3540,7 +3538,7 @@
                 <a:latin typeface="Microsoft JhengHei" panose="020B0604030504040204" pitchFamily="34" charset="-120"/>
                 <a:ea typeface="Microsoft JhengHei" panose="020B0604030504040204" pitchFamily="34" charset="-120"/>
               </a:rPr>
-              <a:t>袮</a:t>
+              <a:t>祢</a:t>
             </a:r>
             <a:r>
               <a:rPr lang="zh-TW" altLang="en-US" sz="6400" b="1" dirty="0">
@@ -3582,7 +3580,7 @@
                 <a:latin typeface="Microsoft JhengHei" panose="020B0604030504040204" pitchFamily="34" charset="-120"/>
                 <a:ea typeface="Microsoft JhengHei" panose="020B0604030504040204" pitchFamily="34" charset="-120"/>
               </a:rPr>
-              <a:t>袮</a:t>
+              <a:t>祢</a:t>
             </a:r>
             <a:r>
               <a:rPr lang="zh-TW" altLang="en-US" sz="6400" b="1" dirty="0">
@@ -3744,7 +3742,7 @@
                 <a:latin typeface="Microsoft JhengHei" panose="020B0604030504040204" pitchFamily="34" charset="-120"/>
                 <a:ea typeface="Microsoft JhengHei" panose="020B0604030504040204" pitchFamily="34" charset="-120"/>
               </a:rPr>
-              <a:t>袮  </a:t>
+              <a:t>祢  </a:t>
             </a:r>
             <a:r>
               <a:rPr lang="zh-TW" altLang="en-US" sz="6400" b="1" dirty="0">
@@ -3927,7 +3925,7 @@
                 <a:latin typeface="Microsoft JhengHei" panose="020B0604030504040204" pitchFamily="34" charset="-120"/>
                 <a:ea typeface="Microsoft JhengHei" panose="020B0604030504040204" pitchFamily="34" charset="-120"/>
               </a:rPr>
-              <a:t>袮</a:t>
+              <a:t>祢</a:t>
             </a:r>
             <a:endParaRPr lang="en-US" altLang="zh-TW" sz="6400" b="1" dirty="0">
               <a:solidFill>
@@ -4090,19 +4088,9 @@
                 <a:latin typeface="Microsoft JhengHei" panose="020B0604030504040204" pitchFamily="34" charset="-120"/>
                 <a:ea typeface="Microsoft JhengHei" panose="020B0604030504040204" pitchFamily="34" charset="-120"/>
               </a:rPr>
-              <a:t>賜我信心與勇</a:t>
-            </a:r>
-            <a:r>
-              <a:rPr lang="zh-TW" altLang="en-US" sz="6400" b="1" dirty="0" smtClean="0">
-                <a:solidFill>
-                  <a:srgbClr val="000066"/>
-                </a:solidFill>
-                <a:latin typeface="Microsoft JhengHei" panose="020B0604030504040204" pitchFamily="34" charset="-120"/>
-                <a:ea typeface="Microsoft JhengHei" panose="020B0604030504040204" pitchFamily="34" charset="-120"/>
-              </a:rPr>
-              <a:t>氣</a:t>
-            </a:r>
-            <a:endParaRPr lang="en-US" altLang="zh-TW" sz="6400" b="1" dirty="0" smtClean="0">
+              <a:t>賜我信心與勇氣</a:t>
+            </a:r>
+            <a:endParaRPr lang="en-US" altLang="zh-TW" sz="6400" b="1" dirty="0">
               <a:solidFill>
                 <a:srgbClr val="000066"/>
               </a:solidFill>
@@ -4115,34 +4103,14 @@
               <a:buNone/>
             </a:pPr>
             <a:r>
-              <a:rPr lang="zh-TW" altLang="en-US" sz="6400" b="1" dirty="0" smtClean="0">
+              <a:rPr lang="zh-TW" altLang="en-US" sz="6400" b="1" dirty="0">
                 <a:solidFill>
                   <a:srgbClr val="000066"/>
                 </a:solidFill>
                 <a:latin typeface="Microsoft JhengHei" panose="020B0604030504040204" pitchFamily="34" charset="-120"/>
                 <a:ea typeface="Microsoft JhengHei" panose="020B0604030504040204" pitchFamily="34" charset="-120"/>
               </a:rPr>
-              <a:t>邁</a:t>
-            </a:r>
-            <a:r>
-              <a:rPr lang="zh-TW" altLang="en-US" sz="6400" b="1" dirty="0">
-                <a:solidFill>
-                  <a:srgbClr val="000066"/>
-                </a:solidFill>
-                <a:latin typeface="Microsoft JhengHei" panose="020B0604030504040204" pitchFamily="34" charset="-120"/>
-                <a:ea typeface="Microsoft JhengHei" panose="020B0604030504040204" pitchFamily="34" charset="-120"/>
-              </a:rPr>
-              <a:t>向這新的世</a:t>
-            </a:r>
-            <a:r>
-              <a:rPr lang="zh-TW" altLang="en-US" sz="6400" b="1" dirty="0" smtClean="0">
-                <a:solidFill>
-                  <a:srgbClr val="000066"/>
-                </a:solidFill>
-                <a:latin typeface="Microsoft JhengHei" panose="020B0604030504040204" pitchFamily="34" charset="-120"/>
-                <a:ea typeface="Microsoft JhengHei" panose="020B0604030504040204" pitchFamily="34" charset="-120"/>
-              </a:rPr>
-              <a:t>紀</a:t>
+              <a:t>邁向這新的世紀</a:t>
             </a:r>
             <a:endParaRPr lang="vi-VN" sz="6400" b="1" dirty="0">
               <a:solidFill>
@@ -4276,7 +4244,7 @@
               <a:buNone/>
             </a:pPr>
             <a:r>
-              <a:rPr lang="zh-TW" altLang="en-US" sz="6400" b="1" dirty="0" smtClean="0">
+              <a:rPr lang="zh-TW" altLang="en-US" sz="6400" b="1" dirty="0">
                 <a:solidFill>
                   <a:srgbClr val="000066"/>
                 </a:solidFill>
@@ -4286,34 +4254,24 @@
               <a:t>願</a:t>
             </a:r>
             <a:r>
-              <a:rPr lang="zh-CN" altLang="en-US" sz="6400" b="1" smtClean="0">
+              <a:rPr lang="zh-CN" altLang="en-US" sz="6400" b="1" dirty="0">
                 <a:solidFill>
                   <a:srgbClr val="000066"/>
                 </a:solidFill>
                 <a:latin typeface="Microsoft JhengHei" panose="020B0604030504040204" pitchFamily="34" charset="-120"/>
                 <a:ea typeface="Microsoft JhengHei" panose="020B0604030504040204" pitchFamily="34" charset="-120"/>
               </a:rPr>
-              <a:t>袮</a:t>
-            </a:r>
-            <a:r>
-              <a:rPr lang="zh-TW" altLang="en-US" sz="6400" b="1" smtClean="0">
+              <a:t>祢</a:t>
+            </a:r>
+            <a:r>
+              <a:rPr lang="zh-TW" altLang="en-US" sz="6400" b="1" dirty="0">
                 <a:solidFill>
                   <a:srgbClr val="000066"/>
                 </a:solidFill>
                 <a:latin typeface="Microsoft JhengHei" panose="020B0604030504040204" pitchFamily="34" charset="-120"/>
                 <a:ea typeface="Microsoft JhengHei" panose="020B0604030504040204" pitchFamily="34" charset="-120"/>
               </a:rPr>
-              <a:t>榮</a:t>
-            </a:r>
-            <a:r>
-              <a:rPr lang="zh-TW" altLang="en-US" sz="6400" b="1" dirty="0">
-                <a:solidFill>
-                  <a:srgbClr val="000066"/>
-                </a:solidFill>
-                <a:latin typeface="Microsoft JhengHei" panose="020B0604030504040204" pitchFamily="34" charset="-120"/>
-                <a:ea typeface="Microsoft JhengHei" panose="020B0604030504040204" pitchFamily="34" charset="-120"/>
-              </a:rPr>
-              <a:t>耀的國度早日降臨</a:t>
+              <a:t>榮耀的國度早日降臨</a:t>
             </a:r>
             <a:endParaRPr lang="vi-VN" sz="6400" b="1" dirty="0">
               <a:solidFill>
